--- a/curso_es/pptx/S16.pptx
+++ b/curso_es/pptx/S16.pptx
@@ -4110,7 +4110,7 @@
                 </a:solidFill>
                 <a:latin typeface="Nunito Sans"/>
               </a:rPr>
-              <a:t>Iker, al profesor: «No me pongas el parte por usar el móvil en clase. Mi madre me castigará sin ir al partido del Athletic».</a:t>
+              <a:t>Un chico, al profesor: «No me pongas el parte por usar el móvil en clase. Mi madre me castigará sin ir al partido del Athletic».</a:t>
             </a:r>
           </a:p>
         </p:txBody>
@@ -4183,7 +4183,7 @@
                 </a:solidFill>
                 <a:latin typeface="Nunito Sans"/>
               </a:rPr>
-              <a:t>¿Qué razón da Iker? Que el castigo le dará mucha pena.</a:t>
+              <a:t>¿Qué razón da el chico? Que el castigo le dará mucha pena.</a:t>
             </a:r>
           </a:p>
           <a:p>
